--- a/testdata/corpus/s004-audio/s004-audio.edited.pptx
+++ b/testdata/corpus/s004-audio/s004-audio.edited.pptx
@@ -86,7 +86,7 @@
           <a:lstStyle/>
           <a:p>
             <a:r>
-              <a:t>Audio Sample (s004-audio)</a:t>
+              <a:t>Audio Test (Q3-2026)</a:t>
             </a:r>
           </a:p>
         </p:txBody>
@@ -107,39 +107,14 @@
         </p:blipFill>
         <p:spPr>
           <a:xfrm>
-            <a:off x="0" y="0"/>
-            <a:ext cx="0" cy="0"/>
+            <a:off x="914400" y="2743200"/>
+            <a:ext cx="914400" cy="914400"/>
           </a:xfrm>
           <a:prstGeom prst="rect">
             <a:avLst/>
           </a:prstGeom>
         </p:spPr>
       </p:pic>
-      <p:sp>
-        <p:nvSpPr>
-          <p:cNvPr id="4" name="TextBox __SHAPE_ID__"/>
-          <p:cNvSpPr txBox="1"/>
-          <p:nvPr/>
-        </p:nvSpPr>
-        <p:spPr>
-          <a:xfrm>
-            <a:off x="914400" y="2743200"/>
-            <a:ext cx="6096000" cy="914400"/>
-          </a:xfrm>
-          <a:prstGeom prst="rect">
-            <a:avLst/>
-          </a:prstGeom>
-        </p:spPr>
-        <p:txBody>
-          <a:bodyPr/>
-          <a:lstStyle/>
-          <a:p>
-            <a:r>
-              <a:t>Edited: Q3-2026 Audio Test</a:t>
-            </a:r>
-          </a:p>
-        </p:txBody>
-      </p:sp>
     </p:spTree>
   </p:cSld>
   <p:clrMapOvr>

--- a/testdata/corpus/s004-audio/s004-audio.edited.pptx
+++ b/testdata/corpus/s004-audio/s004-audio.edited.pptx
@@ -93,14 +93,18 @@
       </p:sp>
       <p:pic>
         <p:nvPicPr>
-          <p:cNvPr id="3" name="Audio 3"/>
-          <p:cNvPicPr/>
+          <p:cNvPr id="3" name="Audio 3">
+            <a:hlinkClick r:id="" action="ppaction://media"/>
+          </p:cNvPr>
+          <p:cNvPicPr>
+            <a:picLocks noChangeAspect="1"/>
+          </p:cNvPicPr>
           <p:nvPr>
             <a:audioFile r:link="rId2"/>
           </p:nvPr>
         </p:nvPicPr>
         <p:blipFill>
-          <a:blip r:embed="rId2"/>
+          <a:blip r:embed="rId3"/>
           <a:stretch>
             <a:fillRect/>
           </a:stretch>

--- a/testdata/corpus/s004-audio/s004-audio.edited.pptx
+++ b/testdata/corpus/s004-audio/s004-audio.edited.pptx
@@ -111,7 +111,7 @@
         </p:blipFill>
         <p:spPr>
           <a:xfrm>
-            <a:off x="914400" y="2743200"/>
+            <a:off x="11049000" y="5715000"/>
             <a:ext cx="914400" cy="914400"/>
           </a:xfrm>
           <a:prstGeom prst="rect">

--- a/testdata/corpus/s004-audio/s004-audio.edited.pptx
+++ b/testdata/corpus/s004-audio/s004-audio.edited.pptx
@@ -131,7 +131,7 @@
         <p:cTn id="900000" dur="indefinite" restart="never" nodeType="tmRoot">
           <p:childTnLst>
             <p:audio>
-              <p:cMediaNode vol="80">
+              <p:cMediaNode vol="80000">
                 <p:cTn id="900006" fill="hold" display="0">
                   <p:stCondLst>
                     <p:cond delay="0"/>

--- a/testdata/corpus/s004-audio/s004-audio.edited.pptx
+++ b/testdata/corpus/s004-audio/s004-audio.edited.pptx
@@ -101,10 +101,15 @@
           </p:cNvPicPr>
           <p:nvPr>
             <a:audioFile r:link="rId2"/>
+            <p:extLst>
+              <p:ext uri="{DAA4B4D4-6D71-4841-9C94-3DE7FCFB9230}">
+                <p14:media xmlns:p14="http://schemas.microsoft.com/office/powerpoint/2010/main" r:embed="rId3"/>
+              </p:ext>
+            </p:extLst>
           </p:nvPr>
         </p:nvPicPr>
         <p:blipFill>
-          <a:blip r:embed="rId3"/>
+          <a:blip r:embed="rId4"/>
           <a:stretch>
             <a:fillRect/>
           </a:stretch>

--- a/testdata/corpus/s004-audio/s004-audio.edited.pptx
+++ b/testdata/corpus/s004-audio/s004-audio.edited.pptx
@@ -135,12 +135,67 @@
       <p:par>
         <p:cTn id="900000" dur="indefinite" restart="never" nodeType="tmRoot">
           <p:childTnLst>
+            <p:seq concurrent="1" nextAc="seek">
+              <p:cTn id="900301" dur="indefinite" nodeType="mainSeq">
+                <p:childTnLst>
+                  <p:par>
+                    <p:cTn id="900302" fill="hold">
+                      <p:stCondLst>
+                        <p:cond delay="indefinite"/>
+                      </p:stCondLst>
+                      <p:childTnLst>
+                        <p:par>
+                          <p:cTn id="900303" fill="hold">
+                            <p:stCondLst>
+                              <p:cond delay="0"/>
+                            </p:stCondLst>
+                            <p:childTnLst>
+                              <p:par>
+                                <p:cTn id="900304" presetID="1" presetClass="mediacall" presetSubtype="0" fill="hold" nodeType="withEffect">
+                                  <p:stCondLst>
+                                    <p:cond delay="0"/>
+                                  </p:stCondLst>
+                                  <p:childTnLst>
+                                    <p:cmd type="call" cmd="playFrom(0.0)">
+                                      <p:cBhvr>
+                                        <p:cTn id="900305" dur="2000" fill="hold"/>
+                                        <p:tgtEl>
+                                          <p:spTgt spid="3"/>
+                                        </p:tgtEl>
+                                      </p:cBhvr>
+                                    </p:cmd>
+                                  </p:childTnLst>
+                                </p:cTn>
+                              </p:par>
+                            </p:childTnLst>
+                          </p:cTn>
+                        </p:par>
+                      </p:childTnLst>
+                    </p:cTn>
+                  </p:par>
+                </p:childTnLst>
+              </p:cTn>
+              <p:nextCondLst>
+                <p:cond evt="onNext" delay="0">
+                  <p:tgtEl>
+                    <p:sldTgt/>
+                  </p:tgtEl>
+                </p:cond>
+              </p:nextCondLst>
+            </p:seq>
             <p:audio>
               <p:cMediaNode vol="80000">
-                <p:cTn id="900006" fill="hold" display="0">
+                <p:cTn id="900306" fill="hold" display="0">
                   <p:stCondLst>
-                    <p:cond delay="0"/>
+                    <p:cond delay="indefinite"/>
                   </p:stCondLst>
+                  <p:endCondLst>
+                    <p:cond evt="onStopAudio" delay="0">
+                      <p:tgtEl>
+                        <p:sldTgt/>
+                      </p:tgtEl>
+                    </p:cond>
+                  </p:endCondLst>
                 </p:cTn>
                 <p:tgtEl>
                   <p:spTgt spid="3"/>
